--- a/docs/content/ancova/ancova_lecture.pptx
+++ b/docs/content/ancova/ancova_lecture.pptx
@@ -4288,7 +4288,7 @@
             </a:pPr>
             <a:r>
               <a:rPr/>
-              <a:t>Building the ANCOVA Model in R</a:t>
+              <a:t>Building the ANCOVA Model in R — The Two Formulas</a:t>
             </a:r>
           </a:p>
         </p:txBody>
@@ -4416,7 +4416,7 @@
             </a:pPr>
             <a:r>
               <a:rPr/>
-              <a:t>ANCOVA in R: The 3-Step Workflow</a:t>
+              <a:t>ANCOVA in R: Workflow Steps 1 and 2</a:t>
             </a:r>
           </a:p>
         </p:txBody>
@@ -4758,7 +4758,7 @@
             </a:pPr>
             <a:r>
               <a:rPr/>
-              <a:t>ANCOVA in R: The 3-Step Workflow</a:t>
+              <a:t>ANCOVA in R: Workflow Step 3</a:t>
             </a:r>
           </a:p>
         </p:txBody>
@@ -6964,7 +6964,7 @@
             </a:pPr>
             <a:r>
               <a:rPr/>
-              <a:t>Partridge Example: Step 1 - Test Homogeneity</a:t>
+              <a:t>Partridge Example: Steps 1–2 — Test Homogeneity of Slopes</a:t>
             </a:r>
           </a:p>
         </p:txBody>
@@ -7001,14 +7001,32 @@
             <a:pPr lvl="1"/>
             <a:r>
               <a:rPr/>
-              <a:t>The p-value for the interaction term (THORAX:treatment) is xl.</a:t>
+              <a:t>The p-value for the interaction term (</a:t>
+            </a:r>
+            <a:r>
+              <a:rPr>
+                <a:latin typeface="Courier"/>
+              </a:rPr>
+              <a:t>THORAX:treatment</a:t>
+            </a:r>
+            <a:r>
+              <a:rPr/>
+              <a:t>) is </a:t>
+            </a:r>
+            <a:r>
+              <a:rPr b="1"/>
+              <a:t>0.9844</a:t>
+            </a:r>
+            <a:r>
+              <a:rPr/>
+              <a:t>.</a:t>
             </a:r>
           </a:p>
           <a:p>
             <a:pPr lvl="1"/>
             <a:r>
               <a:rPr/>
-              <a:t>Since this value is &gt; 0.05, we conclude the slopes are homogeneous.</a:t>
+              <a:t>Since this is well &gt; 0.05, we conclude the slopes are homogeneous — the five treatment groups share a common relationship between thorax length and longevity.</a:t>
             </a:r>
           </a:p>
           <a:p>
@@ -7469,7 +7487,7 @@
             </a:pPr>
             <a:r>
               <a:rPr/>
-              <a:t>Partridge Example: Step 3 ANCOVA Analysis</a:t>
+              <a:t>Partridge Example: Step 3 — Fit the Additive ANCOVA</a:t>
             </a:r>
           </a:p>
         </p:txBody>
@@ -8011,7 +8029,7 @@
                 </a:solidFill>
                 <a:latin typeface="Courier"/>
               </a:rPr>
-              <a:t>##  No females                        65.4 2.11 119     61.3     69.6</a:t>
+              <a:t>##  No females                        61.5 2.11 119     57.3     65.7</a:t>
             </a:r>
             <a:br/>
             <a:r>
@@ -8021,7 +8039,7 @@
                 </a:solidFill>
                 <a:latin typeface="Courier"/>
               </a:rPr>
-              <a:t>##  One virgin female daily           61.5 2.11 119     57.3     65.7</a:t>
+              <a:t>##  One inseminated female daily      64.2 2.10 119     60.0     68.3</a:t>
             </a:r>
             <a:br/>
             <a:r>
@@ -8031,7 +8049,7 @@
                 </a:solidFill>
                 <a:latin typeface="Courier"/>
               </a:rPr>
-              <a:t>##  Eight virgin females daily        64.2 2.10 119     60.0     68.3</a:t>
+              <a:t>##  Eight inseminated females daily   65.4 2.11 119     61.3     69.6</a:t>
             </a:r>
             <a:br/>
             <a:r>
@@ -8041,7 +8059,7 @@
                 </a:solidFill>
                 <a:latin typeface="Courier"/>
               </a:rPr>
-              <a:t>##  One inseminated female daily      54.5 2.11 119     50.3     58.7</a:t>
+              <a:t>##  One virgin female daily           54.5 2.11 119     50.3     58.7</a:t>
             </a:r>
             <a:br/>
             <a:r>
@@ -8051,7 +8069,7 @@
                 </a:solidFill>
                 <a:latin typeface="Courier"/>
               </a:rPr>
-              <a:t>##  Eight inseminated females daily   41.6 2.12 119     37.4     45.8</a:t>
+              <a:t>##  Eight virgin females daily        41.6 2.12 119     37.4     45.8</a:t>
             </a:r>
             <a:br/>
             <a:r>
@@ -8273,7 +8291,7 @@
                 </a:solidFill>
                 <a:latin typeface="Courier"/>
               </a:rPr>
-              <a:t>##  No females - One virgin female daily                               3.93 3.00</a:t>
+              <a:t>##  No females - One inseminated female daily                         -2.65 2.98</a:t>
             </a:r>
             <a:br/>
             <a:r>
@@ -8283,7 +8301,7 @@
                 </a:solidFill>
                 <a:latin typeface="Courier"/>
               </a:rPr>
-              <a:t>##  No females - Eight virgin females daily                            1.28 2.98</a:t>
+              <a:t>##  No females - Eight inseminated females daily                      -3.93 3.00</a:t>
             </a:r>
             <a:br/>
             <a:r>
@@ -8293,7 +8311,7 @@
                 </a:solidFill>
                 <a:latin typeface="Courier"/>
               </a:rPr>
-              <a:t>##  No females - One inseminated female daily                         10.95 3.00</a:t>
+              <a:t>##  No females - One virgin female daily                               7.02 2.97</a:t>
             </a:r>
             <a:br/>
             <a:r>
@@ -8303,7 +8321,7 @@
                 </a:solidFill>
                 <a:latin typeface="Courier"/>
               </a:rPr>
-              <a:t>##  No females - Eight inseminated females daily                      23.88 2.97</a:t>
+              <a:t>##  No females - Eight virgin females daily                           19.95 3.01</a:t>
             </a:r>
             <a:br/>
             <a:r>
@@ -8313,7 +8331,7 @@
                 </a:solidFill>
                 <a:latin typeface="Courier"/>
               </a:rPr>
-              <a:t>##  One virgin female daily - Eight virgin females daily              -2.65 2.98</a:t>
+              <a:t>##  One inseminated female daily - Eight inseminated females daily    -1.28 2.98</a:t>
             </a:r>
             <a:br/>
             <a:r>
@@ -8323,7 +8341,7 @@
                 </a:solidFill>
                 <a:latin typeface="Courier"/>
               </a:rPr>
-              <a:t>##  One virgin female daily - One inseminated female daily             7.02 2.97</a:t>
+              <a:t>##  One inseminated female daily - One virgin female daily             9.67 2.98</a:t>
             </a:r>
             <a:br/>
             <a:r>
@@ -8333,7 +8351,7 @@
                 </a:solidFill>
                 <a:latin typeface="Courier"/>
               </a:rPr>
-              <a:t>##  One virgin female daily - Eight inseminated females daily         19.95 3.01</a:t>
+              <a:t>##  One inseminated female daily - Eight virgin females daily         22.60 2.99</a:t>
             </a:r>
             <a:br/>
             <a:r>
@@ -8343,7 +8361,7 @@
                 </a:solidFill>
                 <a:latin typeface="Courier"/>
               </a:rPr>
-              <a:t>##  Eight virgin females daily - One inseminated female daily          9.67 2.98</a:t>
+              <a:t>##  Eight inseminated females daily - One virgin female daily         10.95 3.00</a:t>
             </a:r>
             <a:br/>
             <a:r>
@@ -8353,7 +8371,7 @@
                 </a:solidFill>
                 <a:latin typeface="Courier"/>
               </a:rPr>
-              <a:t>##  Eight virgin females daily - Eight inseminated females daily      22.60 2.99</a:t>
+              <a:t>##  Eight inseminated females daily - Eight virgin females daily      23.88 2.97</a:t>
             </a:r>
             <a:br/>
             <a:r>
@@ -8363,7 +8381,7 @@
                 </a:solidFill>
                 <a:latin typeface="Courier"/>
               </a:rPr>
-              <a:t>##  One inseminated female daily - Eight inseminated females daily    12.93 3.01</a:t>
+              <a:t>##  One virgin female daily - Eight virgin females daily              12.93 3.01</a:t>
             </a:r>
             <a:br/>
             <a:r>
@@ -8383,7 +8401,7 @@
                 </a:solidFill>
                 <a:latin typeface="Courier"/>
               </a:rPr>
-              <a:t>##  119   1.311  0.6849</a:t>
+              <a:t>##  119  -0.891  0.8996</a:t>
             </a:r>
             <a:br/>
             <a:r>
@@ -8393,7 +8411,7 @@
                 </a:solidFill>
                 <a:latin typeface="Courier"/>
               </a:rPr>
-              <a:t>##  119   0.428  0.9929</a:t>
+              <a:t>##  119  -1.311  0.6849</a:t>
             </a:r>
             <a:br/>
             <a:r>
@@ -8403,6 +8421,56 @@
                 </a:solidFill>
                 <a:latin typeface="Courier"/>
               </a:rPr>
+              <a:t>##  119   2.361  0.1336</a:t>
+            </a:r>
+            <a:br/>
+            <a:r>
+              <a:rPr i="1">
+                <a:solidFill>
+                  <a:srgbClr val="5E5E5E"/>
+                </a:solidFill>
+                <a:latin typeface="Courier"/>
+              </a:rPr>
+              <a:t>##  119   6.636 &lt;0.0001</a:t>
+            </a:r>
+            <a:br/>
+            <a:r>
+              <a:rPr i="1">
+                <a:solidFill>
+                  <a:srgbClr val="5E5E5E"/>
+                </a:solidFill>
+                <a:latin typeface="Courier"/>
+              </a:rPr>
+              <a:t>##  119  -0.428  0.9929</a:t>
+            </a:r>
+            <a:br/>
+            <a:r>
+              <a:rPr i="1">
+                <a:solidFill>
+                  <a:srgbClr val="5E5E5E"/>
+                </a:solidFill>
+                <a:latin typeface="Courier"/>
+              </a:rPr>
+              <a:t>##  119   3.249  0.0129</a:t>
+            </a:r>
+            <a:br/>
+            <a:r>
+              <a:rPr i="1">
+                <a:solidFill>
+                  <a:srgbClr val="5E5E5E"/>
+                </a:solidFill>
+                <a:latin typeface="Courier"/>
+              </a:rPr>
+              <a:t>##  119   7.560 &lt;0.0001</a:t>
+            </a:r>
+            <a:br/>
+            <a:r>
+              <a:rPr i="1">
+                <a:solidFill>
+                  <a:srgbClr val="5E5E5E"/>
+                </a:solidFill>
+                <a:latin typeface="Courier"/>
+              </a:rPr>
               <a:t>##  119   3.650  0.0035</a:t>
             </a:r>
             <a:br/>
@@ -8414,56 +8482,6 @@
                 <a:latin typeface="Courier"/>
               </a:rPr>
               <a:t>##  119   8.031 &lt;0.0001</a:t>
-            </a:r>
-            <a:br/>
-            <a:r>
-              <a:rPr i="1">
-                <a:solidFill>
-                  <a:srgbClr val="5E5E5E"/>
-                </a:solidFill>
-                <a:latin typeface="Courier"/>
-              </a:rPr>
-              <a:t>##  119  -0.891  0.8996</a:t>
-            </a:r>
-            <a:br/>
-            <a:r>
-              <a:rPr i="1">
-                <a:solidFill>
-                  <a:srgbClr val="5E5E5E"/>
-                </a:solidFill>
-                <a:latin typeface="Courier"/>
-              </a:rPr>
-              <a:t>##  119   2.361  0.1336</a:t>
-            </a:r>
-            <a:br/>
-            <a:r>
-              <a:rPr i="1">
-                <a:solidFill>
-                  <a:srgbClr val="5E5E5E"/>
-                </a:solidFill>
-                <a:latin typeface="Courier"/>
-              </a:rPr>
-              <a:t>##  119   6.636 &lt;0.0001</a:t>
-            </a:r>
-            <a:br/>
-            <a:r>
-              <a:rPr i="1">
-                <a:solidFill>
-                  <a:srgbClr val="5E5E5E"/>
-                </a:solidFill>
-                <a:latin typeface="Courier"/>
-              </a:rPr>
-              <a:t>##  119   3.249  0.0129</a:t>
-            </a:r>
-            <a:br/>
-            <a:r>
-              <a:rPr i="1">
-                <a:solidFill>
-                  <a:srgbClr val="5E5E5E"/>
-                </a:solidFill>
-                <a:latin typeface="Courier"/>
-              </a:rPr>
-              <a:t>##  119   7.560 &lt;0.0001</a:t>
             </a:r>
             <a:br/>
             <a:r>
@@ -8545,7 +8563,7 @@
             </a:pPr>
             <a:r>
               <a:rPr/>
-              <a:t>Partridge Example: Pairwise Comparisons</a:t>
+              <a:t>Partridge Example: Pairwise Comparisons — Compact Letters</a:t>
             </a:r>
           </a:p>
         </p:txBody>
@@ -11227,7 +11245,7 @@
             </a:pPr>
             <a:r>
               <a:rPr sz="2000"/>
-              <a:t>“We analyzed the effects of mating strategy on male fruitfly longevity using analysis of covariance (ANCOVA), with thorax length as a covariate. Before conducting the main analysis, we tested the homogeneity of slopes assumption and found no significant interaction between treatment and thorax length (F₄,₁₁₅ = xxx , indicating that the effect of body size on longevity was consistent across treatments.</a:t>
+              <a:t>“We analyzed the effects of mating opportunity on male fruitfly longevity using analysis of covariance (ANCOVA), with thorax length as a covariate. Before conducting the main analysis, we tested the homogeneity-of-slopes assumption and found no significant treatment × thorax length interaction (F₄,₁₁₅ = 0.09, P = 0.98), indicating that the effect of body size on longevity was consistent across treatments.</a:t>
             </a:r>
           </a:p>
           <a:p>
@@ -11236,7 +11254,7 @@
             </a:pPr>
             <a:r>
               <a:rPr sz="2000"/>
-              <a:t>The ANCOVA revealed significant effects of both treatment (F₄,₁₁₉ = xxxx and thorax length (F₁,₁₁₉ = xxxx, P &lt; 0.001) on longevity. Thorax length was positively associated with longevity…</a:t>
+              <a:t>The ANCOVA revealed significant effects of both treatment (F₄,₁₁₉ = 21.75, P &lt; 0.001) and thorax length (F₁,₁₁₉ = 119.22, P &lt; 0.001) on longevity. Thorax length was positively associated with longevity.</a:t>
             </a:r>
           </a:p>
           <a:p>
@@ -11245,7 +11263,66 @@
             </a:pPr>
             <a:r>
               <a:rPr sz="2000"/>
-              <a:t>After adjusting for body size, males with no female partners lived significantly longer (adjusted mean ± SE: xxxx` days) than males in any other treatment group. Pairwise comparisons using Tukey’s HSD test indicated significant differences between most treatment groups (P &lt; 0.05) except between the ‘One virgin female’ and ‘One inseminated female’ groups (P = x).”</a:t>
+              <a:t>After adjusting for body size, longevity declined with the number of </a:t>
+            </a:r>
+            <a:r>
+              <a:rPr sz="2000" i="1"/>
+              <a:t>virgin</a:t>
+            </a:r>
+            <a:r>
+              <a:rPr sz="2000"/>
+              <a:t> females a male was housed with (adjusted mean ± SE: 54.5 ± 2.11 days for one virgin female and 41.6 ± 2.12 days for eight, versus 61.5 ± 2.11 days for males housed alone). Males housed with </a:t>
+            </a:r>
+            <a:r>
+              <a:rPr sz="2000" b="1"/>
+              <a:t>inseminated</a:t>
+            </a:r>
+            <a:r>
+              <a:rPr sz="2000"/>
+              <a:t> females — which do not mate — did not differ from males housed alone (64.2 ± 2.10 and 65.4 ± 2.11 days; Tukey P = 0.90 and P = 0.68). Six of the ten pairwise comparisons were significant at P &lt; 0.05; the four that were not all involved comparisons among the no-female and inseminated-female groups.”</a:t>
+            </a:r>
+          </a:p>
+          <a:p>
+            <a:pPr lvl="0" indent="0" marL="1270000">
+              <a:buNone/>
+            </a:pPr>
+            <a:r>
+              <a:rPr sz="2000" b="1"/>
+              <a:t>Important</a:t>
+            </a:r>
+          </a:p>
+          <a:p>
+            <a:pPr lvl="0" indent="0" marL="1270000">
+              <a:buNone/>
+            </a:pPr>
+            <a:r>
+              <a:rPr sz="2000" b="1"/>
+              <a:t>⚠️ Why the inseminated-female groups are the point of the design</a:t>
+            </a:r>
+          </a:p>
+          <a:p>
+            <a:pPr lvl="0" indent="0" marL="1270000">
+              <a:buNone/>
+            </a:pPr>
+            <a:r>
+              <a:rPr sz="2000"/>
+              <a:t>Newly inseminated females will not mate. Males housed with them get the </a:t>
+            </a:r>
+            <a:r>
+              <a:rPr sz="2000" i="1"/>
+              <a:t>presence</a:t>
+            </a:r>
+            <a:r>
+              <a:rPr sz="2000"/>
+              <a:t> of females without the </a:t>
+            </a:r>
+            <a:r>
+              <a:rPr sz="2000" i="1"/>
+              <a:t>mating</a:t>
+            </a:r>
+            <a:r>
+              <a:rPr sz="2000"/>
+              <a:t>. Those groups are the control that isolates the cost of mating itself from the cost of simply having company — and they show no reduction in longevity at all.</a:t>
             </a:r>
           </a:p>
         </p:txBody>
